--- a/powerpoints/Introduction.pptx
+++ b/powerpoints/Introduction.pptx
@@ -5,7 +5,7 @@
     <p:sldMasterId id="2147483648" r:id="rId1"/>
   </p:sldMasterIdLst>
   <p:notesMasterIdLst>
-    <p:notesMasterId r:id="rId13"/>
+    <p:notesMasterId r:id="rId15"/>
   </p:notesMasterIdLst>
   <p:sldIdLst>
     <p:sldId id="256" r:id="rId2"/>
@@ -18,7 +18,9 @@
     <p:sldId id="350" r:id="rId9"/>
     <p:sldId id="351" r:id="rId10"/>
     <p:sldId id="339" r:id="rId11"/>
-    <p:sldId id="348" r:id="rId12"/>
+    <p:sldId id="354" r:id="rId12"/>
+    <p:sldId id="355" r:id="rId13"/>
+    <p:sldId id="352" r:id="rId14"/>
   </p:sldIdLst>
   <p:sldSz cx="12192000" cy="6858000"/>
   <p:notesSz cx="6858000" cy="9144000"/>
@@ -207,7 +209,7 @@
           <a:p>
             <a:fld id="{BF3E0636-8A2E-4043-881A-1014A5CF3828}" type="datetimeFigureOut">
               <a:rPr lang="en-US" smtClean="0"/>
-              <a:t>5/6/25</a:t>
+              <a:t>10/27/25</a:t>
             </a:fld>
             <a:endParaRPr lang="en-US"/>
           </a:p>
@@ -650,7 +652,13 @@
   <p:cSld>
     <p:spTree>
       <p:nvGrpSpPr>
-        <p:cNvPr id="1" name=""/>
+        <p:cNvPr id="1" name="">
+          <a:extLst>
+            <a:ext uri="{FF2B5EF4-FFF2-40B4-BE49-F238E27FC236}">
+              <a16:creationId xmlns:a16="http://schemas.microsoft.com/office/drawing/2014/main" id="{8091DEC4-36CC-C0C4-13B0-7FF429C92C6E}"/>
+            </a:ext>
+          </a:extLst>
+        </p:cNvPr>
         <p:cNvGrpSpPr/>
         <p:nvPr/>
       </p:nvGrpSpPr>
@@ -664,7 +672,13 @@
       </p:grpSpPr>
       <p:sp>
         <p:nvSpPr>
-          <p:cNvPr id="2" name="Slide Image Placeholder 1"/>
+          <p:cNvPr id="2" name="Slide Image Placeholder 1">
+            <a:extLst>
+              <a:ext uri="{FF2B5EF4-FFF2-40B4-BE49-F238E27FC236}">
+                <a16:creationId xmlns:a16="http://schemas.microsoft.com/office/drawing/2014/main" id="{7B3141C0-EFB2-EBF5-712B-B1CA97EF3192}"/>
+              </a:ext>
+            </a:extLst>
+          </p:cNvPr>
           <p:cNvSpPr>
             <a:spLocks noGrp="1" noRot="1" noChangeAspect="1"/>
           </p:cNvSpPr>
@@ -676,7 +690,13 @@
       </p:sp>
       <p:sp>
         <p:nvSpPr>
-          <p:cNvPr id="3" name="Notes Placeholder 2"/>
+          <p:cNvPr id="3" name="Notes Placeholder 2">
+            <a:extLst>
+              <a:ext uri="{FF2B5EF4-FFF2-40B4-BE49-F238E27FC236}">
+                <a16:creationId xmlns:a16="http://schemas.microsoft.com/office/drawing/2014/main" id="{0466C27F-FC86-3053-7FE0-7AC777E49216}"/>
+              </a:ext>
+            </a:extLst>
+          </p:cNvPr>
           <p:cNvSpPr>
             <a:spLocks noGrp="1"/>
           </p:cNvSpPr>
@@ -695,7 +715,13 @@
       </p:sp>
       <p:sp>
         <p:nvSpPr>
-          <p:cNvPr id="4" name="Slide Number Placeholder 3"/>
+          <p:cNvPr id="4" name="Slide Number Placeholder 3">
+            <a:extLst>
+              <a:ext uri="{FF2B5EF4-FFF2-40B4-BE49-F238E27FC236}">
+                <a16:creationId xmlns:a16="http://schemas.microsoft.com/office/drawing/2014/main" id="{C16C5FFF-EC38-4AAC-51F5-36C1539425A5}"/>
+              </a:ext>
+            </a:extLst>
+          </p:cNvPr>
           <p:cNvSpPr>
             <a:spLocks noGrp="1"/>
           </p:cNvSpPr>
@@ -719,7 +745,223 @@
     </p:spTree>
     <p:extLst>
       <p:ext uri="{BB962C8B-B14F-4D97-AF65-F5344CB8AC3E}">
-        <p14:creationId xmlns:p14="http://schemas.microsoft.com/office/powerpoint/2010/main" val="4103803649"/>
+        <p14:creationId xmlns:p14="http://schemas.microsoft.com/office/powerpoint/2010/main" val="1918418149"/>
+      </p:ext>
+    </p:extLst>
+  </p:cSld>
+  <p:clrMapOvr>
+    <a:masterClrMapping/>
+  </p:clrMapOvr>
+</p:notes>
+</file>
+
+<file path=ppt/notesSlides/notesSlide12.xml><?xml version="1.0" encoding="utf-8"?>
+<p:notes xmlns:a="http://schemas.openxmlformats.org/drawingml/2006/main" xmlns:r="http://schemas.openxmlformats.org/officeDocument/2006/relationships" xmlns:p="http://schemas.openxmlformats.org/presentationml/2006/main">
+  <p:cSld>
+    <p:spTree>
+      <p:nvGrpSpPr>
+        <p:cNvPr id="1" name="">
+          <a:extLst>
+            <a:ext uri="{FF2B5EF4-FFF2-40B4-BE49-F238E27FC236}">
+              <a16:creationId xmlns:a16="http://schemas.microsoft.com/office/drawing/2014/main" id="{01DE98B2-3FA3-FFFA-9241-1B8A170F7D92}"/>
+            </a:ext>
+          </a:extLst>
+        </p:cNvPr>
+        <p:cNvGrpSpPr/>
+        <p:nvPr/>
+      </p:nvGrpSpPr>
+      <p:grpSpPr>
+        <a:xfrm>
+          <a:off x="0" y="0"/>
+          <a:ext cx="0" cy="0"/>
+          <a:chOff x="0" y="0"/>
+          <a:chExt cx="0" cy="0"/>
+        </a:xfrm>
+      </p:grpSpPr>
+      <p:sp>
+        <p:nvSpPr>
+          <p:cNvPr id="2" name="Slide Image Placeholder 1">
+            <a:extLst>
+              <a:ext uri="{FF2B5EF4-FFF2-40B4-BE49-F238E27FC236}">
+                <a16:creationId xmlns:a16="http://schemas.microsoft.com/office/drawing/2014/main" id="{2E9B4162-F669-2BF1-7855-4BF40E9AD92E}"/>
+              </a:ext>
+            </a:extLst>
+          </p:cNvPr>
+          <p:cNvSpPr>
+            <a:spLocks noGrp="1" noRot="1" noChangeAspect="1"/>
+          </p:cNvSpPr>
+          <p:nvPr>
+            <p:ph type="sldImg"/>
+          </p:nvPr>
+        </p:nvSpPr>
+        <p:spPr/>
+      </p:sp>
+      <p:sp>
+        <p:nvSpPr>
+          <p:cNvPr id="3" name="Notes Placeholder 2">
+            <a:extLst>
+              <a:ext uri="{FF2B5EF4-FFF2-40B4-BE49-F238E27FC236}">
+                <a16:creationId xmlns:a16="http://schemas.microsoft.com/office/drawing/2014/main" id="{3CB7816E-2B91-C586-27DA-F6381ABA36EC}"/>
+              </a:ext>
+            </a:extLst>
+          </p:cNvPr>
+          <p:cNvSpPr>
+            <a:spLocks noGrp="1"/>
+          </p:cNvSpPr>
+          <p:nvPr>
+            <p:ph type="body" idx="1"/>
+          </p:nvPr>
+        </p:nvSpPr>
+        <p:spPr/>
+        <p:txBody>
+          <a:bodyPr/>
+          <a:lstStyle/>
+          <a:p>
+            <a:endParaRPr lang="en-US" dirty="0"/>
+          </a:p>
+        </p:txBody>
+      </p:sp>
+      <p:sp>
+        <p:nvSpPr>
+          <p:cNvPr id="4" name="Slide Number Placeholder 3">
+            <a:extLst>
+              <a:ext uri="{FF2B5EF4-FFF2-40B4-BE49-F238E27FC236}">
+                <a16:creationId xmlns:a16="http://schemas.microsoft.com/office/drawing/2014/main" id="{19EFDBC3-31B9-CE0F-249A-F8FC0C7AD77A}"/>
+              </a:ext>
+            </a:extLst>
+          </p:cNvPr>
+          <p:cNvSpPr>
+            <a:spLocks noGrp="1"/>
+          </p:cNvSpPr>
+          <p:nvPr>
+            <p:ph type="sldNum" sz="quarter" idx="10"/>
+          </p:nvPr>
+        </p:nvSpPr>
+        <p:spPr/>
+        <p:txBody>
+          <a:bodyPr/>
+          <a:lstStyle/>
+          <a:p>
+            <a:fld id="{6B573416-B7DF-8D4F-92B3-793638796327}" type="slidenum">
+              <a:rPr lang="en-US" smtClean="0"/>
+              <a:t>12</a:t>
+            </a:fld>
+            <a:endParaRPr lang="en-US"/>
+          </a:p>
+        </p:txBody>
+      </p:sp>
+    </p:spTree>
+    <p:extLst>
+      <p:ext uri="{BB962C8B-B14F-4D97-AF65-F5344CB8AC3E}">
+        <p14:creationId xmlns:p14="http://schemas.microsoft.com/office/powerpoint/2010/main" val="901915996"/>
+      </p:ext>
+    </p:extLst>
+  </p:cSld>
+  <p:clrMapOvr>
+    <a:masterClrMapping/>
+  </p:clrMapOvr>
+</p:notes>
+</file>
+
+<file path=ppt/notesSlides/notesSlide13.xml><?xml version="1.0" encoding="utf-8"?>
+<p:notes xmlns:a="http://schemas.openxmlformats.org/drawingml/2006/main" xmlns:r="http://schemas.openxmlformats.org/officeDocument/2006/relationships" xmlns:p="http://schemas.openxmlformats.org/presentationml/2006/main">
+  <p:cSld>
+    <p:spTree>
+      <p:nvGrpSpPr>
+        <p:cNvPr id="1" name="">
+          <a:extLst>
+            <a:ext uri="{FF2B5EF4-FFF2-40B4-BE49-F238E27FC236}">
+              <a16:creationId xmlns:a16="http://schemas.microsoft.com/office/drawing/2014/main" id="{3B7B788D-6139-5DE8-38E0-AB1B7CDD2611}"/>
+            </a:ext>
+          </a:extLst>
+        </p:cNvPr>
+        <p:cNvGrpSpPr/>
+        <p:nvPr/>
+      </p:nvGrpSpPr>
+      <p:grpSpPr>
+        <a:xfrm>
+          <a:off x="0" y="0"/>
+          <a:ext cx="0" cy="0"/>
+          <a:chOff x="0" y="0"/>
+          <a:chExt cx="0" cy="0"/>
+        </a:xfrm>
+      </p:grpSpPr>
+      <p:sp>
+        <p:nvSpPr>
+          <p:cNvPr id="2" name="Slide Image Placeholder 1">
+            <a:extLst>
+              <a:ext uri="{FF2B5EF4-FFF2-40B4-BE49-F238E27FC236}">
+                <a16:creationId xmlns:a16="http://schemas.microsoft.com/office/drawing/2014/main" id="{F9309333-31E6-51A7-6404-21FB19BCEC8A}"/>
+              </a:ext>
+            </a:extLst>
+          </p:cNvPr>
+          <p:cNvSpPr>
+            <a:spLocks noGrp="1" noRot="1" noChangeAspect="1"/>
+          </p:cNvSpPr>
+          <p:nvPr>
+            <p:ph type="sldImg"/>
+          </p:nvPr>
+        </p:nvSpPr>
+        <p:spPr/>
+      </p:sp>
+      <p:sp>
+        <p:nvSpPr>
+          <p:cNvPr id="3" name="Notes Placeholder 2">
+            <a:extLst>
+              <a:ext uri="{FF2B5EF4-FFF2-40B4-BE49-F238E27FC236}">
+                <a16:creationId xmlns:a16="http://schemas.microsoft.com/office/drawing/2014/main" id="{175EEE74-B87D-568F-DB64-36678A634DD6}"/>
+              </a:ext>
+            </a:extLst>
+          </p:cNvPr>
+          <p:cNvSpPr>
+            <a:spLocks noGrp="1"/>
+          </p:cNvSpPr>
+          <p:nvPr>
+            <p:ph type="body" idx="1"/>
+          </p:nvPr>
+        </p:nvSpPr>
+        <p:spPr/>
+        <p:txBody>
+          <a:bodyPr/>
+          <a:lstStyle/>
+          <a:p>
+            <a:endParaRPr lang="en-US" dirty="0"/>
+          </a:p>
+        </p:txBody>
+      </p:sp>
+      <p:sp>
+        <p:nvSpPr>
+          <p:cNvPr id="4" name="Slide Number Placeholder 3">
+            <a:extLst>
+              <a:ext uri="{FF2B5EF4-FFF2-40B4-BE49-F238E27FC236}">
+                <a16:creationId xmlns:a16="http://schemas.microsoft.com/office/drawing/2014/main" id="{08C81E3F-B4EB-F6EA-3AF4-6AB2F66B5605}"/>
+              </a:ext>
+            </a:extLst>
+          </p:cNvPr>
+          <p:cNvSpPr>
+            <a:spLocks noGrp="1"/>
+          </p:cNvSpPr>
+          <p:nvPr>
+            <p:ph type="sldNum" sz="quarter" idx="10"/>
+          </p:nvPr>
+        </p:nvSpPr>
+        <p:spPr/>
+        <p:txBody>
+          <a:bodyPr/>
+          <a:lstStyle/>
+          <a:p>
+            <a:fld id="{6B573416-B7DF-8D4F-92B3-793638796327}" type="slidenum">
+              <a:rPr lang="en-US" smtClean="0"/>
+              <a:t>13</a:t>
+            </a:fld>
+            <a:endParaRPr lang="en-US"/>
+          </a:p>
+        </p:txBody>
+      </p:sp>
+    </p:spTree>
+    <p:extLst>
+      <p:ext uri="{BB962C8B-B14F-4D97-AF65-F5344CB8AC3E}">
+        <p14:creationId xmlns:p14="http://schemas.microsoft.com/office/powerpoint/2010/main" val="2263071988"/>
       </p:ext>
     </p:extLst>
   </p:cSld>
@@ -1555,7 +1797,7 @@
           <a:p>
             <a:fld id="{F863BEF8-C8D8-2848-8261-78C146860174}" type="datetimeFigureOut">
               <a:rPr lang="en-US" smtClean="0"/>
-              <a:t>5/6/25</a:t>
+              <a:t>10/27/25</a:t>
             </a:fld>
             <a:endParaRPr lang="en-US"/>
           </a:p>
@@ -1723,7 +1965,7 @@
           <a:p>
             <a:fld id="{F863BEF8-C8D8-2848-8261-78C146860174}" type="datetimeFigureOut">
               <a:rPr lang="en-US" smtClean="0"/>
-              <a:t>5/6/25</a:t>
+              <a:t>10/27/25</a:t>
             </a:fld>
             <a:endParaRPr lang="en-US"/>
           </a:p>
@@ -1901,7 +2143,7 @@
           <a:p>
             <a:fld id="{F863BEF8-C8D8-2848-8261-78C146860174}" type="datetimeFigureOut">
               <a:rPr lang="en-US" smtClean="0"/>
-              <a:t>5/6/25</a:t>
+              <a:t>10/27/25</a:t>
             </a:fld>
             <a:endParaRPr lang="en-US"/>
           </a:p>
@@ -2424,7 +2666,7 @@
           <a:p>
             <a:fld id="{F863BEF8-C8D8-2848-8261-78C146860174}" type="datetimeFigureOut">
               <a:rPr lang="en-US" smtClean="0"/>
-              <a:t>5/6/25</a:t>
+              <a:t>10/27/25</a:t>
             </a:fld>
             <a:endParaRPr lang="en-US"/>
           </a:p>
@@ -2669,7 +2911,7 @@
           <a:p>
             <a:fld id="{F863BEF8-C8D8-2848-8261-78C146860174}" type="datetimeFigureOut">
               <a:rPr lang="en-US" smtClean="0"/>
-              <a:t>5/6/25</a:t>
+              <a:t>10/27/25</a:t>
             </a:fld>
             <a:endParaRPr lang="en-US"/>
           </a:p>
@@ -2898,7 +3140,7 @@
           <a:p>
             <a:fld id="{F863BEF8-C8D8-2848-8261-78C146860174}" type="datetimeFigureOut">
               <a:rPr lang="en-US" smtClean="0"/>
-              <a:t>5/6/25</a:t>
+              <a:t>10/27/25</a:t>
             </a:fld>
             <a:endParaRPr lang="en-US"/>
           </a:p>
@@ -3262,7 +3504,7 @@
           <a:p>
             <a:fld id="{F863BEF8-C8D8-2848-8261-78C146860174}" type="datetimeFigureOut">
               <a:rPr lang="en-US" smtClean="0"/>
-              <a:t>5/6/25</a:t>
+              <a:t>10/27/25</a:t>
             </a:fld>
             <a:endParaRPr lang="en-US"/>
           </a:p>
@@ -3379,7 +3621,7 @@
           <a:p>
             <a:fld id="{F863BEF8-C8D8-2848-8261-78C146860174}" type="datetimeFigureOut">
               <a:rPr lang="en-US" smtClean="0"/>
-              <a:t>5/6/25</a:t>
+              <a:t>10/27/25</a:t>
             </a:fld>
             <a:endParaRPr lang="en-US"/>
           </a:p>
@@ -3474,7 +3716,7 @@
           <a:p>
             <a:fld id="{F863BEF8-C8D8-2848-8261-78C146860174}" type="datetimeFigureOut">
               <a:rPr lang="en-US" smtClean="0"/>
-              <a:t>5/6/25</a:t>
+              <a:t>10/27/25</a:t>
             </a:fld>
             <a:endParaRPr lang="en-US"/>
           </a:p>
@@ -3749,7 +3991,7 @@
           <a:p>
             <a:fld id="{F863BEF8-C8D8-2848-8261-78C146860174}" type="datetimeFigureOut">
               <a:rPr lang="en-US" smtClean="0"/>
-              <a:t>5/6/25</a:t>
+              <a:t>10/27/25</a:t>
             </a:fld>
             <a:endParaRPr lang="en-US"/>
           </a:p>
@@ -4001,7 +4243,7 @@
           <a:p>
             <a:fld id="{F863BEF8-C8D8-2848-8261-78C146860174}" type="datetimeFigureOut">
               <a:rPr lang="en-US" smtClean="0"/>
-              <a:t>5/6/25</a:t>
+              <a:t>10/27/25</a:t>
             </a:fld>
             <a:endParaRPr lang="en-US"/>
           </a:p>
@@ -4212,7 +4454,7 @@
           <a:p>
             <a:fld id="{F863BEF8-C8D8-2848-8261-78C146860174}" type="datetimeFigureOut">
               <a:rPr lang="en-US" smtClean="0"/>
-              <a:t>5/6/25</a:t>
+              <a:t>10/27/25</a:t>
             </a:fld>
             <a:endParaRPr lang="en-US"/>
           </a:p>
@@ -4628,7 +4870,12 @@
             <p:ph type="ctrTitle"/>
           </p:nvPr>
         </p:nvSpPr>
-        <p:spPr/>
+        <p:spPr>
+          <a:xfrm>
+            <a:off x="1524000" y="1122363"/>
+            <a:ext cx="9144000" cy="3897872"/>
+          </a:xfrm>
+        </p:spPr>
         <p:txBody>
           <a:bodyPr>
             <a:normAutofit/>
@@ -4636,9 +4883,12 @@
           <a:lstStyle/>
           <a:p>
             <a:r>
-              <a:rPr lang="en-US" sz="7000" dirty="0"/>
-              <a:t>Machine Learning with Scikit-Learn</a:t>
-            </a:r>
+              <a:rPr lang="en-US" b="1" dirty="0"/>
+              <a:t>Introduction to Machine Learning: From Theory to Application</a:t>
+            </a:r>
+            <a:br>
+              <a:rPr lang="en-US" dirty="0"/>
+            </a:br>
             <a:endParaRPr lang="en-US" sz="3300" dirty="0"/>
           </a:p>
         </p:txBody>
@@ -4692,7 +4942,7 @@
           <a:p>
             <a:r>
               <a:rPr lang="en-US" sz="4000" dirty="0"/>
-              <a:t>Why use Scikit-Learn for Machine Learning?</a:t>
+              <a:t>From Theory to Application</a:t>
             </a:r>
           </a:p>
         </p:txBody>
@@ -4709,8 +4959,8 @@
         </p:nvSpPr>
         <p:spPr>
           <a:xfrm>
-            <a:off x="841248" y="1825625"/>
-            <a:ext cx="9507311" cy="4351338"/>
+            <a:off x="838200" y="2209006"/>
+            <a:ext cx="3802189" cy="4351338"/>
           </a:xfrm>
         </p:spPr>
         <p:txBody>
@@ -4720,36 +4970,63 @@
           <a:lstStyle/>
           <a:p>
             <a:r>
-              <a:rPr lang="en-US" sz="2600" dirty="0"/>
-              <a:t>Programming machine learning algorithms from scratch is no easy task. </a:t>
-            </a:r>
-          </a:p>
-          <a:p>
-            <a:r>
-              <a:rPr lang="en-US" sz="2600" dirty="0"/>
-              <a:t>Scikit-learn provides a large amount of well programmed algorithms</a:t>
-            </a:r>
-          </a:p>
-          <a:p>
-            <a:r>
-              <a:rPr lang="en-US" sz="2600" dirty="0"/>
-              <a:t>Syntax allows you to try multiple algorithms quickly</a:t>
-            </a:r>
-          </a:p>
-          <a:p>
-            <a:r>
-              <a:rPr lang="en-US" sz="2600" dirty="0"/>
-              <a:t>Library works well with other python libraries like NumPy, pandas, and matplotlib</a:t>
-            </a:r>
-          </a:p>
-          <a:p>
-            <a:r>
-              <a:rPr lang="en-US" sz="2600" dirty="0"/>
-              <a:t>Library is popular. There are always more scikit-learn tutorials being written. This means that you can get your questions answered more easily. </a:t>
-            </a:r>
-          </a:p>
-        </p:txBody>
-      </p:sp>
+              <a:rPr lang="en-US" b="1" dirty="0"/>
+              <a:t>A Little Theory + Diagrams gives us the why</a:t>
+            </a:r>
+            <a:r>
+              <a:rPr lang="en-US" dirty="0"/>
+              <a:t>: understanding how models learn patterns from data.</a:t>
+            </a:r>
+          </a:p>
+        </p:txBody>
+      </p:sp>
+      <p:pic>
+        <p:nvPicPr>
+          <p:cNvPr id="1028" name="Picture 4">
+            <a:extLst>
+              <a:ext uri="{FF2B5EF4-FFF2-40B4-BE49-F238E27FC236}">
+                <a16:creationId xmlns:a16="http://schemas.microsoft.com/office/drawing/2014/main" id="{158D6D12-84C3-F415-D89F-513016A8248B}"/>
+              </a:ext>
+            </a:extLst>
+          </p:cNvPr>
+          <p:cNvPicPr>
+            <a:picLocks noChangeAspect="1" noChangeArrowheads="1"/>
+          </p:cNvPicPr>
+          <p:nvPr/>
+        </p:nvPicPr>
+        <p:blipFill>
+          <a:blip r:embed="rId3">
+            <a:extLst>
+              <a:ext uri="{28A0092B-C50C-407E-A947-70E740481C1C}">
+                <a14:useLocalDpi xmlns:a14="http://schemas.microsoft.com/office/drawing/2010/main" val="0"/>
+              </a:ext>
+            </a:extLst>
+          </a:blip>
+          <a:srcRect/>
+          <a:stretch>
+            <a:fillRect/>
+          </a:stretch>
+        </p:blipFill>
+        <p:spPr bwMode="auto">
+          <a:xfrm>
+            <a:off x="4822858" y="1825625"/>
+            <a:ext cx="7369142" cy="2559050"/>
+          </a:xfrm>
+          <a:prstGeom prst="rect">
+            <a:avLst/>
+          </a:prstGeom>
+          <a:noFill/>
+          <a:extLst>
+            <a:ext uri="{909E8E84-426E-40DD-AFC4-6F175D3DCCD1}">
+              <a14:hiddenFill xmlns:a14="http://schemas.microsoft.com/office/drawing/2010/main">
+                <a:solidFill>
+                  <a:srgbClr val="FFFFFF"/>
+                </a:solidFill>
+              </a14:hiddenFill>
+            </a:ext>
+          </a:extLst>
+        </p:spPr>
+      </p:pic>
     </p:spTree>
     <p:extLst>
       <p:ext uri="{BB962C8B-B14F-4D97-AF65-F5344CB8AC3E}">
@@ -4768,7 +5045,13 @@
   <p:cSld>
     <p:spTree>
       <p:nvGrpSpPr>
-        <p:cNvPr id="1" name=""/>
+        <p:cNvPr id="1" name="">
+          <a:extLst>
+            <a:ext uri="{FF2B5EF4-FFF2-40B4-BE49-F238E27FC236}">
+              <a16:creationId xmlns:a16="http://schemas.microsoft.com/office/drawing/2014/main" id="{E44561D5-1A29-541D-4F66-290B2567A377}"/>
+            </a:ext>
+          </a:extLst>
+        </p:cNvPr>
         <p:cNvGrpSpPr/>
         <p:nvPr/>
       </p:nvGrpSpPr>
@@ -4782,7 +5065,13 @@
       </p:grpSpPr>
       <p:sp>
         <p:nvSpPr>
-          <p:cNvPr id="2" name="Title 1"/>
+          <p:cNvPr id="2" name="Title 1">
+            <a:extLst>
+              <a:ext uri="{FF2B5EF4-FFF2-40B4-BE49-F238E27FC236}">
+                <a16:creationId xmlns:a16="http://schemas.microsoft.com/office/drawing/2014/main" id="{B0C6632D-3C51-7415-585E-1160CC810E31}"/>
+              </a:ext>
+            </a:extLst>
+          </p:cNvPr>
           <p:cNvSpPr>
             <a:spLocks noGrp="1"/>
           </p:cNvSpPr>
@@ -4799,17 +5088,56 @@
           <a:p>
             <a:r>
               <a:rPr lang="en-US" sz="4000" dirty="0"/>
-              <a:t>Why is this talk using Scikit-Learn?</a:t>
+              <a:t>From Theory to Application</a:t>
+            </a:r>
+          </a:p>
+        </p:txBody>
+      </p:sp>
+      <p:sp>
+        <p:nvSpPr>
+          <p:cNvPr id="4" name="Content Placeholder 2">
+            <a:extLst>
+              <a:ext uri="{FF2B5EF4-FFF2-40B4-BE49-F238E27FC236}">
+                <a16:creationId xmlns:a16="http://schemas.microsoft.com/office/drawing/2014/main" id="{83FCF875-9A3C-8C36-54F8-491F5984DFD0}"/>
+              </a:ext>
+            </a:extLst>
+          </p:cNvPr>
+          <p:cNvSpPr>
+            <a:spLocks noGrp="1"/>
+          </p:cNvSpPr>
+          <p:nvPr>
+            <p:ph idx="1"/>
+          </p:nvPr>
+        </p:nvSpPr>
+        <p:spPr>
+          <a:xfrm>
+            <a:off x="838200" y="2209006"/>
+            <a:ext cx="3802189" cy="4351338"/>
+          </a:xfrm>
+        </p:spPr>
+        <p:txBody>
+          <a:bodyPr>
+            <a:noAutofit/>
+          </a:bodyPr>
+          <a:lstStyle/>
+          <a:p>
+            <a:r>
+              <a:rPr lang="en-US" b="1" dirty="0"/>
+              <a:t>Application shows the how:</a:t>
+            </a:r>
+            <a:r>
+              <a:rPr lang="en-US" dirty="0"/>
+              <a:t> turning that understanding into working code.</a:t>
             </a:r>
           </a:p>
         </p:txBody>
       </p:sp>
       <p:pic>
         <p:nvPicPr>
-          <p:cNvPr id="5" name="Picture 4" descr="Chart, box and whisker chart&#10;&#10;Description automatically generated">
+          <p:cNvPr id="7" name="Picture 6" descr="A computer code with text&#10;&#10;AI-generated content may be incorrect.">
             <a:extLst>
               <a:ext uri="{FF2B5EF4-FFF2-40B4-BE49-F238E27FC236}">
-                <a16:creationId xmlns:a16="http://schemas.microsoft.com/office/drawing/2014/main" id="{2D68FD96-55D9-E04A-B73A-309D3A73EEA4}"/>
+                <a16:creationId xmlns:a16="http://schemas.microsoft.com/office/drawing/2014/main" id="{112FE545-29F6-8B23-A56B-69AD99B81FA7}"/>
               </a:ext>
             </a:extLst>
           </p:cNvPr>
@@ -4826,20 +5154,56 @@
         </p:blipFill>
         <p:spPr>
           <a:xfrm>
-            <a:off x="5820229" y="1825625"/>
-            <a:ext cx="6021656" cy="4351338"/>
+            <a:off x="5091129" y="1958975"/>
+            <a:ext cx="6832600" cy="2425700"/>
           </a:xfrm>
           <a:prstGeom prst="rect">
             <a:avLst/>
           </a:prstGeom>
         </p:spPr>
       </p:pic>
-      <p:sp>
-        <p:nvSpPr>
-          <p:cNvPr id="10" name="Content Placeholder 2">
+    </p:spTree>
+    <p:extLst>
+      <p:ext uri="{BB962C8B-B14F-4D97-AF65-F5344CB8AC3E}">
+        <p14:creationId xmlns:p14="http://schemas.microsoft.com/office/powerpoint/2010/main" val="4035451794"/>
+      </p:ext>
+    </p:extLst>
+  </p:cSld>
+  <p:clrMapOvr>
+    <a:masterClrMapping/>
+  </p:clrMapOvr>
+</p:sld>
+</file>
+
+<file path=ppt/slides/slide12.xml><?xml version="1.0" encoding="utf-8"?>
+<p:sld xmlns:a="http://schemas.openxmlformats.org/drawingml/2006/main" xmlns:r="http://schemas.openxmlformats.org/officeDocument/2006/relationships" xmlns:p="http://schemas.openxmlformats.org/presentationml/2006/main">
+  <p:cSld>
+    <p:spTree>
+      <p:nvGrpSpPr>
+        <p:cNvPr id="1" name="">
+          <a:extLst>
+            <a:ext uri="{FF2B5EF4-FFF2-40B4-BE49-F238E27FC236}">
+              <a16:creationId xmlns:a16="http://schemas.microsoft.com/office/drawing/2014/main" id="{AE4EF61F-93B4-4D2A-31AE-0558DBBC249E}"/>
+            </a:ext>
+          </a:extLst>
+        </p:cNvPr>
+        <p:cNvGrpSpPr/>
+        <p:nvPr/>
+      </p:nvGrpSpPr>
+      <p:grpSpPr>
+        <a:xfrm>
+          <a:off x="0" y="0"/>
+          <a:ext cx="0" cy="0"/>
+          <a:chOff x="0" y="0"/>
+          <a:chExt cx="0" cy="0"/>
+        </a:xfrm>
+      </p:grpSpPr>
+      <p:sp>
+        <p:nvSpPr>
+          <p:cNvPr id="2" name="Title 1">
             <a:extLst>
               <a:ext uri="{FF2B5EF4-FFF2-40B4-BE49-F238E27FC236}">
-                <a16:creationId xmlns:a16="http://schemas.microsoft.com/office/drawing/2014/main" id="{BF03C97B-47BE-1040-8F67-42A61415032F}"/>
+                <a16:creationId xmlns:a16="http://schemas.microsoft.com/office/drawing/2014/main" id="{89A0D09A-4453-148B-BD7E-31FDCD8A0E90}"/>
               </a:ext>
             </a:extLst>
           </p:cNvPr>
@@ -4847,13 +5211,192 @@
             <a:spLocks noGrp="1"/>
           </p:cNvSpPr>
           <p:nvPr>
+            <p:ph type="title"/>
+          </p:nvPr>
+        </p:nvSpPr>
+        <p:spPr/>
+        <p:txBody>
+          <a:bodyPr>
+            <a:normAutofit/>
+          </a:bodyPr>
+          <a:lstStyle/>
+          <a:p>
+            <a:r>
+              <a:rPr lang="en-US" sz="4000" dirty="0"/>
+              <a:t>From Theory to Application</a:t>
+            </a:r>
+          </a:p>
+        </p:txBody>
+      </p:sp>
+      <p:sp>
+        <p:nvSpPr>
+          <p:cNvPr id="4" name="Content Placeholder 2">
+            <a:extLst>
+              <a:ext uri="{FF2B5EF4-FFF2-40B4-BE49-F238E27FC236}">
+                <a16:creationId xmlns:a16="http://schemas.microsoft.com/office/drawing/2014/main" id="{2F1E6D0B-48EF-425A-9964-0F938A30AF16}"/>
+              </a:ext>
+            </a:extLst>
+          </p:cNvPr>
+          <p:cNvSpPr>
+            <a:spLocks noGrp="1"/>
+          </p:cNvSpPr>
+          <p:nvPr>
+            <p:ph idx="1"/>
+          </p:nvPr>
+        </p:nvSpPr>
+        <p:spPr>
+          <a:xfrm>
+            <a:off x="838200" y="2209006"/>
+            <a:ext cx="3802189" cy="4351338"/>
+          </a:xfrm>
+        </p:spPr>
+        <p:txBody>
+          <a:bodyPr>
+            <a:noAutofit/>
+          </a:bodyPr>
+          <a:lstStyle/>
+          <a:p>
+            <a:r>
+              <a:rPr lang="en-US" b="1" dirty="0"/>
+              <a:t>Images will help with explanations</a:t>
+            </a:r>
+            <a:endParaRPr lang="en-US" dirty="0"/>
+          </a:p>
+        </p:txBody>
+      </p:sp>
+      <p:pic>
+        <p:nvPicPr>
+          <p:cNvPr id="5124" name="Picture 4">
+            <a:extLst>
+              <a:ext uri="{FF2B5EF4-FFF2-40B4-BE49-F238E27FC236}">
+                <a16:creationId xmlns:a16="http://schemas.microsoft.com/office/drawing/2014/main" id="{C6FBF694-0804-ABA2-6E1D-827E4247BF34}"/>
+              </a:ext>
+            </a:extLst>
+          </p:cNvPr>
+          <p:cNvPicPr>
+            <a:picLocks noChangeAspect="1" noChangeArrowheads="1"/>
+          </p:cNvPicPr>
+          <p:nvPr/>
+        </p:nvPicPr>
+        <p:blipFill>
+          <a:blip r:embed="rId3">
+            <a:extLst>
+              <a:ext uri="{28A0092B-C50C-407E-A947-70E740481C1C}">
+                <a14:useLocalDpi xmlns:a14="http://schemas.microsoft.com/office/drawing/2010/main" val="0"/>
+              </a:ext>
+            </a:extLst>
+          </a:blip>
+          <a:srcRect/>
+          <a:stretch>
+            <a:fillRect/>
+          </a:stretch>
+        </p:blipFill>
+        <p:spPr bwMode="auto">
+          <a:xfrm>
+            <a:off x="6260167" y="1802785"/>
+            <a:ext cx="4498321" cy="3252430"/>
+          </a:xfrm>
+          <a:prstGeom prst="rect">
+            <a:avLst/>
+          </a:prstGeom>
+          <a:noFill/>
+          <a:extLst>
+            <a:ext uri="{909E8E84-426E-40DD-AFC4-6F175D3DCCD1}">
+              <a14:hiddenFill xmlns:a14="http://schemas.microsoft.com/office/drawing/2010/main">
+                <a:solidFill>
+                  <a:srgbClr val="FFFFFF"/>
+                </a:solidFill>
+              </a14:hiddenFill>
+            </a:ext>
+          </a:extLst>
+        </p:spPr>
+      </p:pic>
+    </p:spTree>
+    <p:extLst>
+      <p:ext uri="{BB962C8B-B14F-4D97-AF65-F5344CB8AC3E}">
+        <p14:creationId xmlns:p14="http://schemas.microsoft.com/office/powerpoint/2010/main" val="2513726830"/>
+      </p:ext>
+    </p:extLst>
+  </p:cSld>
+  <p:clrMapOvr>
+    <a:masterClrMapping/>
+  </p:clrMapOvr>
+</p:sld>
+</file>
+
+<file path=ppt/slides/slide13.xml><?xml version="1.0" encoding="utf-8"?>
+<p:sld xmlns:a="http://schemas.openxmlformats.org/drawingml/2006/main" xmlns:r="http://schemas.openxmlformats.org/officeDocument/2006/relationships" xmlns:p="http://schemas.openxmlformats.org/presentationml/2006/main">
+  <p:cSld>
+    <p:spTree>
+      <p:nvGrpSpPr>
+        <p:cNvPr id="1" name="">
+          <a:extLst>
+            <a:ext uri="{FF2B5EF4-FFF2-40B4-BE49-F238E27FC236}">
+              <a16:creationId xmlns:a16="http://schemas.microsoft.com/office/drawing/2014/main" id="{B09947C6-0028-C438-5CFC-896568A54E97}"/>
+            </a:ext>
+          </a:extLst>
+        </p:cNvPr>
+        <p:cNvGrpSpPr/>
+        <p:nvPr/>
+      </p:nvGrpSpPr>
+      <p:grpSpPr>
+        <a:xfrm>
+          <a:off x="0" y="0"/>
+          <a:ext cx="0" cy="0"/>
+          <a:chOff x="0" y="0"/>
+          <a:chExt cx="0" cy="0"/>
+        </a:xfrm>
+      </p:grpSpPr>
+      <p:sp>
+        <p:nvSpPr>
+          <p:cNvPr id="2" name="Title 1">
+            <a:extLst>
+              <a:ext uri="{FF2B5EF4-FFF2-40B4-BE49-F238E27FC236}">
+                <a16:creationId xmlns:a16="http://schemas.microsoft.com/office/drawing/2014/main" id="{758A68F1-110B-F55A-9F5A-018C60892608}"/>
+              </a:ext>
+            </a:extLst>
+          </p:cNvPr>
+          <p:cNvSpPr>
+            <a:spLocks noGrp="1"/>
+          </p:cNvSpPr>
+          <p:nvPr>
+            <p:ph type="title"/>
+          </p:nvPr>
+        </p:nvSpPr>
+        <p:spPr/>
+        <p:txBody>
+          <a:bodyPr>
+            <a:normAutofit/>
+          </a:bodyPr>
+          <a:lstStyle/>
+          <a:p>
+            <a:r>
+              <a:rPr lang="en-US" sz="4000" dirty="0"/>
+              <a:t>Why use Scikit-Learn for Machine Learning?</a:t>
+            </a:r>
+          </a:p>
+        </p:txBody>
+      </p:sp>
+      <p:sp>
+        <p:nvSpPr>
+          <p:cNvPr id="4" name="Content Placeholder 2">
+            <a:extLst>
+              <a:ext uri="{FF2B5EF4-FFF2-40B4-BE49-F238E27FC236}">
+                <a16:creationId xmlns:a16="http://schemas.microsoft.com/office/drawing/2014/main" id="{1A053760-B139-EB1B-53EE-56959E5D2D61}"/>
+              </a:ext>
+            </a:extLst>
+          </p:cNvPr>
+          <p:cNvSpPr>
+            <a:spLocks noGrp="1"/>
+          </p:cNvSpPr>
+          <p:nvPr>
             <p:ph idx="1"/>
           </p:nvPr>
         </p:nvSpPr>
         <p:spPr>
           <a:xfrm>
             <a:off x="841248" y="1825625"/>
-            <a:ext cx="4978981" cy="4351338"/>
+            <a:ext cx="9507311" cy="4351338"/>
           </a:xfrm>
         </p:spPr>
         <p:txBody>
@@ -4863,14 +5406,38 @@
           <a:lstStyle/>
           <a:p>
             <a:r>
+              <a:rPr lang="en-US" sz="2600" b="1" u="sng" dirty="0"/>
+              <a:t>This is a not a long talk.</a:t>
+            </a:r>
+          </a:p>
+          <a:p>
+            <a:r>
               <a:rPr lang="en-US" sz="2600" dirty="0"/>
-              <a:t>The goal of this talk is to try out multiple machine learning algorithms quickly and learn each algorithms strengths and weaknesses. </a:t>
+              <a:t>Programming machine learning algorithms from scratch is no easy task. </a:t>
             </a:r>
           </a:p>
           <a:p>
             <a:r>
               <a:rPr lang="en-US" sz="2600" dirty="0"/>
-              <a:t>In the process, learn concepts such as bias, variance, overfitting, and underfitting</a:t>
+              <a:t>Scikit-learn provides a large amount of well programmed algorithms.</a:t>
+            </a:r>
+          </a:p>
+          <a:p>
+            <a:r>
+              <a:rPr lang="en-US" sz="2600" dirty="0"/>
+              <a:t>Syntax allows you to try multiple algorithms quickly.</a:t>
+            </a:r>
+          </a:p>
+          <a:p>
+            <a:r>
+              <a:rPr lang="en-US" sz="2600" dirty="0"/>
+              <a:t>Library works well with other python libraries like NumPy, pandas, and matplotlib.</a:t>
+            </a:r>
+          </a:p>
+          <a:p>
+            <a:r>
+              <a:rPr lang="en-US" sz="2600" dirty="0"/>
+              <a:t>Library is popular. </a:t>
             </a:r>
           </a:p>
         </p:txBody>
@@ -4878,7 +5445,7 @@
     </p:spTree>
     <p:extLst>
       <p:ext uri="{BB962C8B-B14F-4D97-AF65-F5344CB8AC3E}">
-        <p14:creationId xmlns:p14="http://schemas.microsoft.com/office/powerpoint/2010/main" val="597891694"/>
+        <p14:creationId xmlns:p14="http://schemas.microsoft.com/office/powerpoint/2010/main" val="4126168969"/>
       </p:ext>
     </p:extLst>
   </p:cSld>
@@ -5014,7 +5581,7 @@
           <a:p>
             <a:r>
               <a:rPr lang="en" dirty="0"/>
-              <a:t>PhD Student at Georgia Tech</a:t>
+              <a:t>ML PhD Student at Georgia Tech</a:t>
             </a:r>
             <a:endParaRPr lang="en-US" dirty="0"/>
           </a:p>
@@ -5375,6 +5942,16 @@
           <a:lstStyle/>
           <a:p>
             <a:r>
+              <a:rPr lang="en-US"/>
+              <a:t>Linear </a:t>
+            </a:r>
+            <a:r>
+              <a:rPr lang="en-US" dirty="0"/>
+              <a:t>regression</a:t>
+            </a:r>
+          </a:p>
+          <a:p>
+            <a:r>
               <a:rPr lang="en-US" dirty="0"/>
               <a:t>Python strings</a:t>
             </a:r>
@@ -5505,7 +6082,7 @@
             </a:pPr>
             <a:r>
               <a:rPr lang="en-US" sz="4200" dirty="0"/>
-              <a:t>“field of study that gives computers the ability to learn from data without being explicitly programmed”</a:t>
+              <a:t>“field of study that gives computers the ability to learn from data without being explicitly programmed.”</a:t>
             </a:r>
           </a:p>
           <a:p>
@@ -5762,7 +6339,7 @@
             </a:pPr>
             <a:r>
               <a:rPr lang="en-US" sz="4200" dirty="0"/>
-              <a:t>“Once models have been fit to previously seen data, they can be used to predict and understand aspects of newly observed data”</a:t>
+              <a:t>“Once models have been fit to previously seen data, they can be used to predict and understand aspects of newly observed data.”</a:t>
             </a:r>
           </a:p>
           <a:p>
@@ -6112,7 +6689,7 @@
             </a:pPr>
             <a:r>
               <a:rPr lang="en-US" sz="2800" dirty="0"/>
-              <a:t>Modeling the measured features of data without some target (label/value)</a:t>
+              <a:t>Modeling the measured features of data without some target (label/value).</a:t>
             </a:r>
           </a:p>
         </p:txBody>

--- a/powerpoints/Introduction.pptx
+++ b/powerpoints/Introduction.pptx
@@ -5,7 +5,7 @@
     <p:sldMasterId id="2147483648" r:id="rId1"/>
   </p:sldMasterIdLst>
   <p:notesMasterIdLst>
-    <p:notesMasterId r:id="rId15"/>
+    <p:notesMasterId r:id="rId16"/>
   </p:notesMasterIdLst>
   <p:sldIdLst>
     <p:sldId id="256" r:id="rId2"/>
@@ -21,6 +21,7 @@
     <p:sldId id="354" r:id="rId12"/>
     <p:sldId id="355" r:id="rId13"/>
     <p:sldId id="352" r:id="rId14"/>
+    <p:sldId id="356" r:id="rId15"/>
   </p:sldIdLst>
   <p:sldSz cx="12192000" cy="6858000"/>
   <p:notesSz cx="6858000" cy="9144000"/>
@@ -209,7 +210,7 @@
           <a:p>
             <a:fld id="{BF3E0636-8A2E-4043-881A-1014A5CF3828}" type="datetimeFigureOut">
               <a:rPr lang="en-US" smtClean="0"/>
-              <a:t>10/27/25</a:t>
+              <a:t>4/27/26</a:t>
             </a:fld>
             <a:endParaRPr lang="en-US"/>
           </a:p>
@@ -971,6 +972,114 @@
 </p:notes>
 </file>
 
+<file path=ppt/notesSlides/notesSlide14.xml><?xml version="1.0" encoding="utf-8"?>
+<p:notes xmlns:a="http://schemas.openxmlformats.org/drawingml/2006/main" xmlns:r="http://schemas.openxmlformats.org/officeDocument/2006/relationships" xmlns:p="http://schemas.openxmlformats.org/presentationml/2006/main">
+  <p:cSld>
+    <p:spTree>
+      <p:nvGrpSpPr>
+        <p:cNvPr id="1" name="">
+          <a:extLst>
+            <a:ext uri="{FF2B5EF4-FFF2-40B4-BE49-F238E27FC236}">
+              <a16:creationId xmlns:a16="http://schemas.microsoft.com/office/drawing/2014/main" id="{28DCCC7F-0541-228A-E94E-4A5E3B8990C8}"/>
+            </a:ext>
+          </a:extLst>
+        </p:cNvPr>
+        <p:cNvGrpSpPr/>
+        <p:nvPr/>
+      </p:nvGrpSpPr>
+      <p:grpSpPr>
+        <a:xfrm>
+          <a:off x="0" y="0"/>
+          <a:ext cx="0" cy="0"/>
+          <a:chOff x="0" y="0"/>
+          <a:chExt cx="0" cy="0"/>
+        </a:xfrm>
+      </p:grpSpPr>
+      <p:sp>
+        <p:nvSpPr>
+          <p:cNvPr id="2" name="Slide Image Placeholder 1">
+            <a:extLst>
+              <a:ext uri="{FF2B5EF4-FFF2-40B4-BE49-F238E27FC236}">
+                <a16:creationId xmlns:a16="http://schemas.microsoft.com/office/drawing/2014/main" id="{8EF12595-145A-D782-1A4F-76176C9F5568}"/>
+              </a:ext>
+            </a:extLst>
+          </p:cNvPr>
+          <p:cNvSpPr>
+            <a:spLocks noGrp="1" noRot="1" noChangeAspect="1"/>
+          </p:cNvSpPr>
+          <p:nvPr>
+            <p:ph type="sldImg"/>
+          </p:nvPr>
+        </p:nvSpPr>
+        <p:spPr/>
+      </p:sp>
+      <p:sp>
+        <p:nvSpPr>
+          <p:cNvPr id="3" name="Notes Placeholder 2">
+            <a:extLst>
+              <a:ext uri="{FF2B5EF4-FFF2-40B4-BE49-F238E27FC236}">
+                <a16:creationId xmlns:a16="http://schemas.microsoft.com/office/drawing/2014/main" id="{E1CE6E01-6D0A-0548-752C-DA7A29DD11F9}"/>
+              </a:ext>
+            </a:extLst>
+          </p:cNvPr>
+          <p:cNvSpPr>
+            <a:spLocks noGrp="1"/>
+          </p:cNvSpPr>
+          <p:nvPr>
+            <p:ph type="body" idx="1"/>
+          </p:nvPr>
+        </p:nvSpPr>
+        <p:spPr/>
+        <p:txBody>
+          <a:bodyPr/>
+          <a:lstStyle/>
+          <a:p>
+            <a:endParaRPr lang="en-US" dirty="0"/>
+          </a:p>
+        </p:txBody>
+      </p:sp>
+      <p:sp>
+        <p:nvSpPr>
+          <p:cNvPr id="4" name="Slide Number Placeholder 3">
+            <a:extLst>
+              <a:ext uri="{FF2B5EF4-FFF2-40B4-BE49-F238E27FC236}">
+                <a16:creationId xmlns:a16="http://schemas.microsoft.com/office/drawing/2014/main" id="{30D037B3-0C48-A38C-D6EC-BDCBE9CA61AA}"/>
+              </a:ext>
+            </a:extLst>
+          </p:cNvPr>
+          <p:cNvSpPr>
+            <a:spLocks noGrp="1"/>
+          </p:cNvSpPr>
+          <p:nvPr>
+            <p:ph type="sldNum" sz="quarter" idx="10"/>
+          </p:nvPr>
+        </p:nvSpPr>
+        <p:spPr/>
+        <p:txBody>
+          <a:bodyPr/>
+          <a:lstStyle/>
+          <a:p>
+            <a:fld id="{6B573416-B7DF-8D4F-92B3-793638796327}" type="slidenum">
+              <a:rPr lang="en-US" smtClean="0"/>
+              <a:t>14</a:t>
+            </a:fld>
+            <a:endParaRPr lang="en-US"/>
+          </a:p>
+        </p:txBody>
+      </p:sp>
+    </p:spTree>
+    <p:extLst>
+      <p:ext uri="{BB962C8B-B14F-4D97-AF65-F5344CB8AC3E}">
+        <p14:creationId xmlns:p14="http://schemas.microsoft.com/office/powerpoint/2010/main" val="428152235"/>
+      </p:ext>
+    </p:extLst>
+  </p:cSld>
+  <p:clrMapOvr>
+    <a:masterClrMapping/>
+  </p:clrMapOvr>
+</p:notes>
+</file>
+
 <file path=ppt/notesSlides/notesSlide2.xml><?xml version="1.0" encoding="utf-8"?>
 <p:notes xmlns:a="http://schemas.openxmlformats.org/drawingml/2006/main" xmlns:r="http://schemas.openxmlformats.org/officeDocument/2006/relationships" xmlns:p="http://schemas.openxmlformats.org/presentationml/2006/main" showMasterSp="0" showMasterPhAnim="0">
   <p:cSld>
@@ -1797,7 +1906,7 @@
           <a:p>
             <a:fld id="{F863BEF8-C8D8-2848-8261-78C146860174}" type="datetimeFigureOut">
               <a:rPr lang="en-US" smtClean="0"/>
-              <a:t>10/27/25</a:t>
+              <a:t>4/27/26</a:t>
             </a:fld>
             <a:endParaRPr lang="en-US"/>
           </a:p>
@@ -1965,7 +2074,7 @@
           <a:p>
             <a:fld id="{F863BEF8-C8D8-2848-8261-78C146860174}" type="datetimeFigureOut">
               <a:rPr lang="en-US" smtClean="0"/>
-              <a:t>10/27/25</a:t>
+              <a:t>4/27/26</a:t>
             </a:fld>
             <a:endParaRPr lang="en-US"/>
           </a:p>
@@ -2143,7 +2252,7 @@
           <a:p>
             <a:fld id="{F863BEF8-C8D8-2848-8261-78C146860174}" type="datetimeFigureOut">
               <a:rPr lang="en-US" smtClean="0"/>
-              <a:t>10/27/25</a:t>
+              <a:t>4/27/26</a:t>
             </a:fld>
             <a:endParaRPr lang="en-US"/>
           </a:p>
@@ -2666,7 +2775,7 @@
           <a:p>
             <a:fld id="{F863BEF8-C8D8-2848-8261-78C146860174}" type="datetimeFigureOut">
               <a:rPr lang="en-US" smtClean="0"/>
-              <a:t>10/27/25</a:t>
+              <a:t>4/27/26</a:t>
             </a:fld>
             <a:endParaRPr lang="en-US"/>
           </a:p>
@@ -2911,7 +3020,7 @@
           <a:p>
             <a:fld id="{F863BEF8-C8D8-2848-8261-78C146860174}" type="datetimeFigureOut">
               <a:rPr lang="en-US" smtClean="0"/>
-              <a:t>10/27/25</a:t>
+              <a:t>4/27/26</a:t>
             </a:fld>
             <a:endParaRPr lang="en-US"/>
           </a:p>
@@ -3140,7 +3249,7 @@
           <a:p>
             <a:fld id="{F863BEF8-C8D8-2848-8261-78C146860174}" type="datetimeFigureOut">
               <a:rPr lang="en-US" smtClean="0"/>
-              <a:t>10/27/25</a:t>
+              <a:t>4/27/26</a:t>
             </a:fld>
             <a:endParaRPr lang="en-US"/>
           </a:p>
@@ -3504,7 +3613,7 @@
           <a:p>
             <a:fld id="{F863BEF8-C8D8-2848-8261-78C146860174}" type="datetimeFigureOut">
               <a:rPr lang="en-US" smtClean="0"/>
-              <a:t>10/27/25</a:t>
+              <a:t>4/27/26</a:t>
             </a:fld>
             <a:endParaRPr lang="en-US"/>
           </a:p>
@@ -3621,7 +3730,7 @@
           <a:p>
             <a:fld id="{F863BEF8-C8D8-2848-8261-78C146860174}" type="datetimeFigureOut">
               <a:rPr lang="en-US" smtClean="0"/>
-              <a:t>10/27/25</a:t>
+              <a:t>4/27/26</a:t>
             </a:fld>
             <a:endParaRPr lang="en-US"/>
           </a:p>
@@ -3716,7 +3825,7 @@
           <a:p>
             <a:fld id="{F863BEF8-C8D8-2848-8261-78C146860174}" type="datetimeFigureOut">
               <a:rPr lang="en-US" smtClean="0"/>
-              <a:t>10/27/25</a:t>
+              <a:t>4/27/26</a:t>
             </a:fld>
             <a:endParaRPr lang="en-US"/>
           </a:p>
@@ -3991,7 +4100,7 @@
           <a:p>
             <a:fld id="{F863BEF8-C8D8-2848-8261-78C146860174}" type="datetimeFigureOut">
               <a:rPr lang="en-US" smtClean="0"/>
-              <a:t>10/27/25</a:t>
+              <a:t>4/27/26</a:t>
             </a:fld>
             <a:endParaRPr lang="en-US"/>
           </a:p>
@@ -4243,7 +4352,7 @@
           <a:p>
             <a:fld id="{F863BEF8-C8D8-2848-8261-78C146860174}" type="datetimeFigureOut">
               <a:rPr lang="en-US" smtClean="0"/>
-              <a:t>10/27/25</a:t>
+              <a:t>4/27/26</a:t>
             </a:fld>
             <a:endParaRPr lang="en-US"/>
           </a:p>
@@ -4454,7 +4563,7 @@
           <a:p>
             <a:fld id="{F863BEF8-C8D8-2848-8261-78C146860174}" type="datetimeFigureOut">
               <a:rPr lang="en-US" smtClean="0"/>
-              <a:t>10/27/25</a:t>
+              <a:t>4/27/26</a:t>
             </a:fld>
             <a:endParaRPr lang="en-US"/>
           </a:p>
@@ -5446,6 +5555,126 @@
     <p:extLst>
       <p:ext uri="{BB962C8B-B14F-4D97-AF65-F5344CB8AC3E}">
         <p14:creationId xmlns:p14="http://schemas.microsoft.com/office/powerpoint/2010/main" val="4126168969"/>
+      </p:ext>
+    </p:extLst>
+  </p:cSld>
+  <p:clrMapOvr>
+    <a:masterClrMapping/>
+  </p:clrMapOvr>
+</p:sld>
+</file>
+
+<file path=ppt/slides/slide14.xml><?xml version="1.0" encoding="utf-8"?>
+<p:sld xmlns:a="http://schemas.openxmlformats.org/drawingml/2006/main" xmlns:r="http://schemas.openxmlformats.org/officeDocument/2006/relationships" xmlns:p="http://schemas.openxmlformats.org/presentationml/2006/main">
+  <p:cSld>
+    <p:spTree>
+      <p:nvGrpSpPr>
+        <p:cNvPr id="1" name="">
+          <a:extLst>
+            <a:ext uri="{FF2B5EF4-FFF2-40B4-BE49-F238E27FC236}">
+              <a16:creationId xmlns:a16="http://schemas.microsoft.com/office/drawing/2014/main" id="{7C27A494-0280-69B5-BA4C-59FF1A0CB631}"/>
+            </a:ext>
+          </a:extLst>
+        </p:cNvPr>
+        <p:cNvGrpSpPr/>
+        <p:nvPr/>
+      </p:nvGrpSpPr>
+      <p:grpSpPr>
+        <a:xfrm>
+          <a:off x="0" y="0"/>
+          <a:ext cx="0" cy="0"/>
+          <a:chOff x="0" y="0"/>
+          <a:chExt cx="0" cy="0"/>
+        </a:xfrm>
+      </p:grpSpPr>
+      <p:sp>
+        <p:nvSpPr>
+          <p:cNvPr id="2" name="Title 1">
+            <a:extLst>
+              <a:ext uri="{FF2B5EF4-FFF2-40B4-BE49-F238E27FC236}">
+                <a16:creationId xmlns:a16="http://schemas.microsoft.com/office/drawing/2014/main" id="{A14BDA30-1B26-EDC1-CEAF-20A78CB6BE81}"/>
+              </a:ext>
+            </a:extLst>
+          </p:cNvPr>
+          <p:cNvSpPr>
+            <a:spLocks noGrp="1"/>
+          </p:cNvSpPr>
+          <p:nvPr>
+            <p:ph type="title"/>
+          </p:nvPr>
+        </p:nvSpPr>
+        <p:spPr/>
+        <p:txBody>
+          <a:bodyPr>
+            <a:normAutofit/>
+          </a:bodyPr>
+          <a:lstStyle/>
+          <a:p>
+            <a:r>
+              <a:rPr lang="en-US" sz="4000" dirty="0"/>
+              <a:t>Why about using Cursor/Claude/</a:t>
+            </a:r>
+            <a:r>
+              <a:rPr lang="en-US" sz="4000" dirty="0" err="1"/>
+              <a:t>etc</a:t>
+            </a:r>
+            <a:r>
+              <a:rPr lang="en-US" sz="4000" dirty="0"/>
+              <a:t>?</a:t>
+            </a:r>
+          </a:p>
+        </p:txBody>
+      </p:sp>
+      <p:sp>
+        <p:nvSpPr>
+          <p:cNvPr id="4" name="Content Placeholder 2">
+            <a:extLst>
+              <a:ext uri="{FF2B5EF4-FFF2-40B4-BE49-F238E27FC236}">
+                <a16:creationId xmlns:a16="http://schemas.microsoft.com/office/drawing/2014/main" id="{4CA3008A-D342-CCF1-B790-588D01EC3B8C}"/>
+              </a:ext>
+            </a:extLst>
+          </p:cNvPr>
+          <p:cNvSpPr>
+            <a:spLocks noGrp="1"/>
+          </p:cNvSpPr>
+          <p:nvPr>
+            <p:ph idx="1"/>
+          </p:nvPr>
+        </p:nvSpPr>
+        <p:spPr>
+          <a:xfrm>
+            <a:off x="841248" y="1825625"/>
+            <a:ext cx="9507311" cy="4351338"/>
+          </a:xfrm>
+        </p:spPr>
+        <p:txBody>
+          <a:bodyPr>
+            <a:noAutofit/>
+          </a:bodyPr>
+          <a:lstStyle/>
+          <a:p>
+            <a:r>
+              <a:rPr lang="en-US" sz="2600" dirty="0"/>
+              <a:t>You can use it</a:t>
+            </a:r>
+          </a:p>
+          <a:p>
+            <a:r>
+              <a:rPr lang="en-US" sz="2600" dirty="0"/>
+              <a:t>Understanding how things work will enhance your ability to utilize </a:t>
+            </a:r>
+            <a:r>
+              <a:rPr lang="en-US" sz="2600"/>
+              <a:t>these tools</a:t>
+            </a:r>
+            <a:endParaRPr lang="en-US" sz="2600" dirty="0"/>
+          </a:p>
+        </p:txBody>
+      </p:sp>
+    </p:spTree>
+    <p:extLst>
+      <p:ext uri="{BB962C8B-B14F-4D97-AF65-F5344CB8AC3E}">
+        <p14:creationId xmlns:p14="http://schemas.microsoft.com/office/powerpoint/2010/main" val="3190058019"/>
       </p:ext>
     </p:extLst>
   </p:cSld>

--- a/powerpoints/Introduction.pptx
+++ b/powerpoints/Introduction.pptx
@@ -5655,19 +5655,19 @@
           <a:p>
             <a:r>
               <a:rPr lang="en-US" sz="2600" dirty="0"/>
-              <a:t>You can use it</a:t>
-            </a:r>
+              <a:t>You can </a:t>
+            </a:r>
+            <a:r>
+              <a:rPr lang="en-US" sz="2600"/>
+              <a:t>use it.</a:t>
+            </a:r>
+            <a:endParaRPr lang="en-US" sz="2600" dirty="0"/>
           </a:p>
           <a:p>
             <a:r>
               <a:rPr lang="en-US" sz="2600" dirty="0"/>
-              <a:t>Understanding how things work will enhance your ability to utilize </a:t>
-            </a:r>
-            <a:r>
-              <a:rPr lang="en-US" sz="2600"/>
-              <a:t>these tools</a:t>
-            </a:r>
-            <a:endParaRPr lang="en-US" sz="2600" dirty="0"/>
+              <a:t>Understanding how things work will enhance your ability to utilize these tools.</a:t>
+            </a:r>
           </a:p>
         </p:txBody>
       </p:sp>
